--- a/week3_unixIII/week3.pptx
+++ b/week3_unixIII/week3.pptx
@@ -7249,7 +7249,19 @@
               <a:rPr lang="en-US" sz="2000" b="1" dirty="0">
                 <a:latin typeface="Helvetica Light" panose="020B0403020202020204" pitchFamily="34" charset="0"/>
               </a:rPr>
-              <a:t>$ bash simple1.sh</a:t>
+              <a:t>$ </a:t>
+            </a:r>
+            <a:r>
+              <a:rPr lang="en-US" sz="2000" b="1" dirty="0" err="1">
+                <a:latin typeface="Helvetica Light" panose="020B0403020202020204" pitchFamily="34" charset="0"/>
+              </a:rPr>
+              <a:t>zsh</a:t>
+            </a:r>
+            <a:r>
+              <a:rPr lang="en-US" sz="2000" b="1" dirty="0">
+                <a:latin typeface="Helvetica Light" panose="020B0403020202020204" pitchFamily="34" charset="0"/>
+              </a:rPr>
+              <a:t> simple1.sh</a:t>
             </a:r>
           </a:p>
         </p:txBody>
@@ -7405,7 +7417,19 @@
               <a:rPr lang="en-US" sz="2000" b="1" dirty="0">
                 <a:latin typeface="Helvetica Light" panose="020B0403020202020204" pitchFamily="34" charset="0"/>
               </a:rPr>
-              <a:t>$ bash simple2.sh</a:t>
+              <a:t>$ </a:t>
+            </a:r>
+            <a:r>
+              <a:rPr lang="en-US" sz="2000" b="1">
+                <a:latin typeface="Helvetica Light" panose="020B0403020202020204" pitchFamily="34" charset="0"/>
+              </a:rPr>
+              <a:t>zsh </a:t>
+            </a:r>
+            <a:r>
+              <a:rPr lang="en-US" sz="2000" b="1" dirty="0">
+                <a:latin typeface="Helvetica Light" panose="020B0403020202020204" pitchFamily="34" charset="0"/>
+              </a:rPr>
+              <a:t>simple2.sh</a:t>
             </a:r>
           </a:p>
         </p:txBody>
@@ -8810,19 +8834,7 @@
               <a:rPr lang="en-US" sz="3000" dirty="0">
                 <a:latin typeface="Helvetica Light" panose="020B0403020202020204" pitchFamily="34" charset="0"/>
               </a:rPr>
-              <a:t>Process control </a:t>
-            </a:r>
-            <a:r>
-              <a:rPr lang="en-US" sz="3000">
-                <a:latin typeface="Helvetica Light" panose="020B0403020202020204" pitchFamily="34" charset="0"/>
-              </a:rPr>
-              <a:t>from Linux </a:t>
-            </a:r>
-            <a:r>
-              <a:rPr lang="en-US" sz="3000" dirty="0">
-                <a:latin typeface="Helvetica Light" panose="020B0403020202020204" pitchFamily="34" charset="0"/>
-              </a:rPr>
-              <a:t>assignment 2</a:t>
+              <a:t>Process control from Linux assignment 2</a:t>
             </a:r>
           </a:p>
         </p:txBody>
@@ -11037,7 +11049,7 @@
         <p:spPr>
           <a:xfrm>
             <a:off x="359854" y="349893"/>
-            <a:ext cx="8762335" cy="553998"/>
+            <a:ext cx="8552341" cy="846386"/>
           </a:xfrm>
           <a:prstGeom prst="rect">
             <a:avLst/>
@@ -11081,20 +11093,50 @@
               <a:t>, </a:t>
             </a:r>
             <a:r>
-              <a:rPr lang="en-US" sz="2900" b="1" dirty="0" err="1">
-                <a:latin typeface="Helvetica Light" panose="020B0403020202020204" pitchFamily="34" charset="0"/>
-              </a:rPr>
-              <a:t>ssh</a:t>
-            </a:r>
-            <a:r>
-              <a:rPr lang="en-US" sz="2900" dirty="0">
-                <a:latin typeface="Helvetica Light" panose="020B0403020202020204" pitchFamily="34" charset="0"/>
-              </a:rPr>
-              <a:t>)</a:t>
-            </a:r>
-            <a:endParaRPr lang="en-US" sz="2900" b="1" dirty="0">
-              <a:latin typeface="Helvetica Light" panose="020B0403020202020204" pitchFamily="34" charset="0"/>
-            </a:endParaRPr>
+              <a:rPr lang="en-US" sz="2900" b="1" dirty="0">
+                <a:latin typeface="Helvetica Light" panose="020B0403020202020204" pitchFamily="34" charset="0"/>
+              </a:rPr>
+              <a:t>ssh)</a:t>
+            </a:r>
+          </a:p>
+          <a:p>
+            <a:pPr algn="ctr"/>
+            <a:r>
+              <a:rPr lang="en-US" sz="2000" i="1" dirty="0">
+                <a:latin typeface="Helvetica Light" panose="020B0403020202020204" pitchFamily="34" charset="0"/>
+              </a:rPr>
+              <a:t>May have to install curl or </a:t>
+            </a:r>
+            <a:r>
+              <a:rPr lang="en-US" sz="2000" i="1" dirty="0" err="1">
+                <a:latin typeface="Helvetica Light" panose="020B0403020202020204" pitchFamily="34" charset="0"/>
+              </a:rPr>
+              <a:t>wget</a:t>
+            </a:r>
+            <a:r>
+              <a:rPr lang="en-US" sz="2000" i="1" dirty="0">
+                <a:latin typeface="Helvetica Light" panose="020B0403020202020204" pitchFamily="34" charset="0"/>
+              </a:rPr>
+              <a:t> with </a:t>
+            </a:r>
+            <a:r>
+              <a:rPr lang="en-US" sz="2000" b="1" i="1" dirty="0">
+                <a:latin typeface="Helvetica Light" panose="020B0403020202020204" pitchFamily="34" charset="0"/>
+              </a:rPr>
+              <a:t>apt</a:t>
+            </a:r>
+            <a:r>
+              <a:rPr lang="en-US" sz="2000" i="1" dirty="0">
+                <a:latin typeface="Helvetica Light" panose="020B0403020202020204" pitchFamily="34" charset="0"/>
+              </a:rPr>
+              <a:t> or </a:t>
+            </a:r>
+            <a:r>
+              <a:rPr lang="en-US" sz="2000" b="1" i="1" dirty="0">
+                <a:latin typeface="Helvetica Light" panose="020B0403020202020204" pitchFamily="34" charset="0"/>
+              </a:rPr>
+              <a:t>brew</a:t>
+            </a:r>
           </a:p>
         </p:txBody>
       </p:sp>
@@ -11159,7 +11201,7 @@
               <a:rPr lang="en-US" sz="2200" b="1" dirty="0" err="1">
                 <a:latin typeface="HELVETICA LIGHT" panose="020B0403020202020204" pitchFamily="34" charset="0"/>
               </a:rPr>
-              <a:t>raw.githubusercontent.com</a:t>
+              <a:t>github.com</a:t>
             </a:r>
             <a:r>
               <a:rPr lang="en-US" sz="2200" b="1" dirty="0">
@@ -11177,13 +11219,13 @@
               <a:rPr lang="en-US" sz="2200" b="1" dirty="0">
                 <a:latin typeface="HELVETICA LIGHT" panose="020B0403020202020204" pitchFamily="34" charset="0"/>
               </a:rPr>
-              <a:t>/F22_BIOL792_coursepage/main/week1_unixI/</a:t>
+              <a:t>/F25_BIOL792/raw/refs/heads/main/week3_unixIII/</a:t>
             </a:r>
             <a:r>
               <a:rPr lang="en-US" sz="2200" b="1" dirty="0" err="1">
                 <a:latin typeface="HELVETICA LIGHT" panose="020B0403020202020204" pitchFamily="34" charset="0"/>
               </a:rPr>
-              <a:t>science.txt</a:t>
+              <a:t>yeast_genome.gff</a:t>
             </a:r>
             <a:r>
               <a:rPr lang="en-US" sz="2200" b="1" dirty="0">
@@ -11325,7 +11367,7 @@
         <p:spPr>
           <a:xfrm>
             <a:off x="250200" y="4651316"/>
-            <a:ext cx="7682467" cy="769441"/>
+            <a:ext cx="7682467" cy="1785104"/>
           </a:xfrm>
           <a:prstGeom prst="rect">
             <a:avLst/>
@@ -11341,38 +11383,70 @@
               <a:rPr lang="en-US" sz="2200" b="1" dirty="0">
                 <a:latin typeface="Helvetica Light" panose="020B0403020202020204" pitchFamily="34" charset="0"/>
               </a:rPr>
-              <a:t>$ curl -o </a:t>
+              <a:t>$ curl "https://</a:t>
             </a:r>
             <a:r>
               <a:rPr lang="en-US" sz="2200" b="1" dirty="0" err="1">
                 <a:latin typeface="Helvetica Light" panose="020B0403020202020204" pitchFamily="34" charset="0"/>
               </a:rPr>
-              <a:t>genbankreadme.txt</a:t>
+              <a:t>eutils.ncbi.nlm.nih.gov</a:t>
             </a:r>
             <a:r>
               <a:rPr lang="en-US" sz="2200" b="1" dirty="0">
                 <a:latin typeface="Helvetica Light" panose="020B0403020202020204" pitchFamily="34" charset="0"/>
               </a:rPr>
-              <a:t> ftp://</a:t>
+              <a:t>/entrez/</a:t>
             </a:r>
             <a:r>
               <a:rPr lang="en-US" sz="2200" b="1" dirty="0" err="1">
                 <a:latin typeface="Helvetica Light" panose="020B0403020202020204" pitchFamily="34" charset="0"/>
               </a:rPr>
-              <a:t>ftp.ncbi.nlm.nih.gov</a:t>
+              <a:t>eutils</a:t>
             </a:r>
             <a:r>
               <a:rPr lang="en-US" sz="2200" b="1" dirty="0">
                 <a:latin typeface="Helvetica Light" panose="020B0403020202020204" pitchFamily="34" charset="0"/>
               </a:rPr>
-              <a:t>/gen bank/</a:t>
+              <a:t>/</a:t>
             </a:r>
             <a:r>
               <a:rPr lang="en-US" sz="2200" b="1" dirty="0" err="1">
                 <a:latin typeface="Helvetica Light" panose="020B0403020202020204" pitchFamily="34" charset="0"/>
               </a:rPr>
-              <a:t>README.genbank</a:t>
-            </a:r>
+              <a:t>efetch.fcgi?db</a:t>
+            </a:r>
+            <a:r>
+              <a:rPr lang="en-US" sz="2200" b="1" dirty="0">
+                <a:latin typeface="Helvetica Light" panose="020B0403020202020204" pitchFamily="34" charset="0"/>
+              </a:rPr>
+              <a:t>=</a:t>
+            </a:r>
+            <a:r>
+              <a:rPr lang="en-US" sz="2200" b="1" dirty="0" err="1">
+                <a:latin typeface="Helvetica Light" panose="020B0403020202020204" pitchFamily="34" charset="0"/>
+              </a:rPr>
+              <a:t>nuccore&amp;id</a:t>
+            </a:r>
+            <a:r>
+              <a:rPr lang="en-US" sz="2200" b="1" dirty="0">
+                <a:latin typeface="Helvetica Light" panose="020B0403020202020204" pitchFamily="34" charset="0"/>
+              </a:rPr>
+              <a:t>=NM_007294.4&amp;rettype=</a:t>
+            </a:r>
+            <a:r>
+              <a:rPr lang="en-US" sz="2200" b="1" dirty="0" err="1">
+                <a:latin typeface="Helvetica Light" panose="020B0403020202020204" pitchFamily="34" charset="0"/>
+              </a:rPr>
+              <a:t>fasta&amp;retmode</a:t>
+            </a:r>
+            <a:r>
+              <a:rPr lang="en-US" sz="2200" b="1" dirty="0">
+                <a:latin typeface="Helvetica Light" panose="020B0403020202020204" pitchFamily="34" charset="0"/>
+              </a:rPr>
+              <a:t>=text" -o BRCA1.fasta</a:t>
+            </a:r>
+          </a:p>
+          <a:p>
             <a:endParaRPr lang="en-US" sz="2200" b="1" dirty="0">
               <a:latin typeface="Helvetica Light" panose="020B0403020202020204" pitchFamily="34" charset="0"/>
             </a:endParaRPr>

--- a/week3_unixIII/week3.pptx
+++ b/week3_unixIII/week3.pptx
@@ -3960,7 +3960,7 @@
         <p:spPr>
           <a:xfrm>
             <a:off x="313579" y="5163410"/>
-            <a:ext cx="5105885" cy="415498"/>
+            <a:ext cx="5179623" cy="415498"/>
           </a:xfrm>
           <a:prstGeom prst="rect">
             <a:avLst/>
@@ -3987,7 +3987,7 @@
                 </a:ln>
                 <a:latin typeface="Helvetica Light" panose="020B0403020202020204" pitchFamily="34" charset="0"/>
               </a:rPr>
-              <a:t>UnixIII_primer.md</a:t>
+              <a:t>linuxIII_primer.md</a:t>
             </a:r>
             <a:r>
               <a:rPr lang="en-US" sz="2100" dirty="0">
@@ -3998,7 +3998,7 @@
                 </a:ln>
                 <a:latin typeface="Helvetica Light" panose="020B0403020202020204" pitchFamily="34" charset="0"/>
               </a:rPr>
-              <a:t>, unix_assignment3.md</a:t>
+              <a:t>, linux_assignment3.md</a:t>
             </a:r>
           </a:p>
         </p:txBody>
@@ -6847,7 +6847,19 @@
               <a:rPr lang="en-US" b="1" dirty="0">
                 <a:latin typeface="Helvetica Light" panose="020B0403020202020204" pitchFamily="34" charset="0"/>
               </a:rPr>
-              <a:t>$ bash </a:t>
+              <a:t>$ </a:t>
+            </a:r>
+            <a:r>
+              <a:rPr lang="en-US" b="1" dirty="0" err="1">
+                <a:latin typeface="Helvetica Light" panose="020B0403020202020204" pitchFamily="34" charset="0"/>
+              </a:rPr>
+              <a:t>zsh</a:t>
+            </a:r>
+            <a:r>
+              <a:rPr lang="en-US" b="1" dirty="0">
+                <a:latin typeface="Helvetica Light" panose="020B0403020202020204" pitchFamily="34" charset="0"/>
+              </a:rPr>
+              <a:t> </a:t>
             </a:r>
             <a:r>
               <a:rPr lang="en-US" b="1" dirty="0" err="1">
@@ -6875,7 +6887,7 @@
               <a:rPr lang="en-US" dirty="0" err="1">
                 <a:latin typeface="Helvetica Light" panose="020B0403020202020204" pitchFamily="34" charset="0"/>
               </a:rPr>
-              <a:t>unix</a:t>
+              <a:t>linux</a:t>
             </a:r>
             <a:r>
               <a:rPr lang="en-US" dirty="0">
@@ -6949,8 +6961,17 @@
               <a:rPr lang="en-US" b="1" dirty="0">
                 <a:latin typeface="Helvetica Light" panose="020B0403020202020204" pitchFamily="34" charset="0"/>
               </a:rPr>
-              <a:t>#!/bin/bash</a:t>
-            </a:r>
+              <a:t>#!/bin/</a:t>
+            </a:r>
+            <a:r>
+              <a:rPr lang="en-US" b="1" dirty="0" err="1">
+                <a:latin typeface="Helvetica Light" panose="020B0403020202020204" pitchFamily="34" charset="0"/>
+              </a:rPr>
+              <a:t>zsh</a:t>
+            </a:r>
+            <a:endParaRPr lang="en-US" b="1" dirty="0">
+              <a:latin typeface="Helvetica Light" panose="020B0403020202020204" pitchFamily="34" charset="0"/>
+            </a:endParaRPr>
           </a:p>
           <a:p>
             <a:endParaRPr lang="en-US" dirty="0">
@@ -7154,7 +7175,19 @@
               <a:rPr lang="en-US" sz="2000" dirty="0">
                 <a:latin typeface="Helvetica Light" panose="020B0403020202020204" pitchFamily="34" charset="0"/>
               </a:rPr>
-              <a:t>#!/bin/bash          </a:t>
+              <a:t>#!/bin/</a:t>
+            </a:r>
+            <a:r>
+              <a:rPr lang="en-US" sz="2000" dirty="0" err="1">
+                <a:latin typeface="Helvetica Light" panose="020B0403020202020204" pitchFamily="34" charset="0"/>
+              </a:rPr>
+              <a:t>zsh</a:t>
+            </a:r>
+            <a:r>
+              <a:rPr lang="en-US" sz="2000" dirty="0">
+                <a:latin typeface="Helvetica Light" panose="020B0403020202020204" pitchFamily="34" charset="0"/>
+              </a:rPr>
+              <a:t>          </a:t>
             </a:r>
           </a:p>
           <a:p>
@@ -7296,7 +7329,19 @@
               <a:rPr lang="en-US" sz="2000" dirty="0">
                 <a:latin typeface="Helvetica Light" panose="020B0403020202020204" pitchFamily="34" charset="0"/>
               </a:rPr>
-              <a:t>#!/bin/bash          </a:t>
+              <a:t>#!/bin/</a:t>
+            </a:r>
+            <a:r>
+              <a:rPr lang="en-US" sz="2000" dirty="0" err="1">
+                <a:latin typeface="Helvetica Light" panose="020B0403020202020204" pitchFamily="34" charset="0"/>
+              </a:rPr>
+              <a:t>zsh</a:t>
+            </a:r>
+            <a:r>
+              <a:rPr lang="en-US" sz="2000" dirty="0">
+                <a:latin typeface="Helvetica Light" panose="020B0403020202020204" pitchFamily="34" charset="0"/>
+              </a:rPr>
+              <a:t>          </a:t>
             </a:r>
           </a:p>
           <a:p>
@@ -7420,16 +7465,16 @@
               <a:t>$ </a:t>
             </a:r>
             <a:r>
-              <a:rPr lang="en-US" sz="2000" b="1">
-                <a:latin typeface="Helvetica Light" panose="020B0403020202020204" pitchFamily="34" charset="0"/>
-              </a:rPr>
-              <a:t>zsh </a:t>
+              <a:rPr lang="en-US" sz="2000" b="1" dirty="0" err="1">
+                <a:latin typeface="Helvetica Light" panose="020B0403020202020204" pitchFamily="34" charset="0"/>
+              </a:rPr>
+              <a:t>zsh</a:t>
             </a:r>
             <a:r>
               <a:rPr lang="en-US" sz="2000" b="1" dirty="0">
                 <a:latin typeface="Helvetica Light" panose="020B0403020202020204" pitchFamily="34" charset="0"/>
               </a:rPr>
-              <a:t>simple2.sh</a:t>
+              <a:t> simple2.sh</a:t>
             </a:r>
           </a:p>
         </p:txBody>
@@ -7600,7 +7645,19 @@
               <a:rPr lang="en-US" sz="2000" dirty="0">
                 <a:latin typeface="Helvetica Light" panose="020B0403020202020204" pitchFamily="34" charset="0"/>
               </a:rPr>
-              <a:t>#!/bin/bash          </a:t>
+              <a:t>#!/bin/</a:t>
+            </a:r>
+            <a:r>
+              <a:rPr lang="en-US" sz="2000" dirty="0" err="1">
+                <a:latin typeface="Helvetica Light" panose="020B0403020202020204" pitchFamily="34" charset="0"/>
+              </a:rPr>
+              <a:t>zsh</a:t>
+            </a:r>
+            <a:r>
+              <a:rPr lang="en-US" sz="2000" dirty="0">
+                <a:latin typeface="Helvetica Light" panose="020B0403020202020204" pitchFamily="34" charset="0"/>
+              </a:rPr>
+              <a:t>          </a:t>
             </a:r>
           </a:p>
           <a:p>
@@ -7752,7 +7809,19 @@
               <a:rPr lang="en-US" dirty="0">
                 <a:latin typeface="Helvetica Light" panose="020B0403020202020204" pitchFamily="34" charset="0"/>
               </a:rPr>
-              <a:t>$ bash simple3.sh</a:t>
+              <a:t>$ </a:t>
+            </a:r>
+            <a:r>
+              <a:rPr lang="en-US" dirty="0" err="1">
+                <a:latin typeface="Helvetica Light" panose="020B0403020202020204" pitchFamily="34" charset="0"/>
+              </a:rPr>
+              <a:t>zsh</a:t>
+            </a:r>
+            <a:r>
+              <a:rPr lang="en-US" dirty="0">
+                <a:latin typeface="Helvetica Light" panose="020B0403020202020204" pitchFamily="34" charset="0"/>
+              </a:rPr>
+              <a:t> simple3.sh</a:t>
             </a:r>
           </a:p>
         </p:txBody>

--- a/week3_unixIII/week3.pptx
+++ b/week3_unixIII/week3.pptx
@@ -4047,8 +4047,8 @@
         </p:nvSpPr>
         <p:spPr>
           <a:xfrm>
-            <a:off x="983976" y="720316"/>
-            <a:ext cx="3815468" cy="553998"/>
+            <a:off x="970647" y="473582"/>
+            <a:ext cx="4055919" cy="1077218"/>
           </a:xfrm>
           <a:prstGeom prst="rect">
             <a:avLst/>
@@ -4062,11 +4062,16 @@
           <a:lstStyle/>
           <a:p>
             <a:r>
-              <a:rPr lang="en-US" sz="3000" dirty="0">
+              <a:rPr lang="en-US" sz="3200" dirty="0">
                 <a:latin typeface="Helvetica Light" panose="020B0403020202020204" pitchFamily="34" charset="0"/>
               </a:rPr>
               <a:t>Reading permissions</a:t>
             </a:r>
+          </a:p>
+          <a:p>
+            <a:endParaRPr lang="en-US" sz="3200" dirty="0">
+              <a:latin typeface="Helvetica Light" panose="020B0403020202020204" pitchFamily="34" charset="0"/>
+            </a:endParaRPr>
           </a:p>
         </p:txBody>
       </p:sp>
@@ -4084,7 +4089,7 @@
         </p:nvSpPr>
         <p:spPr>
           <a:xfrm>
-            <a:off x="2890774" y="2138875"/>
+            <a:off x="3300677" y="3397719"/>
             <a:ext cx="2621230" cy="784830"/>
           </a:xfrm>
           <a:prstGeom prst="rect">
@@ -4146,7 +4151,7 @@
         </p:nvCxnSpPr>
         <p:spPr>
           <a:xfrm>
-            <a:off x="3183148" y="2808956"/>
+            <a:off x="3593051" y="4067800"/>
             <a:ext cx="789317" cy="0"/>
           </a:xfrm>
           <a:prstGeom prst="line">
@@ -4185,7 +4190,7 @@
         </p:nvCxnSpPr>
         <p:spPr>
           <a:xfrm>
-            <a:off x="4050103" y="2817561"/>
+            <a:off x="4460006" y="4076405"/>
             <a:ext cx="646980" cy="0"/>
           </a:xfrm>
           <a:prstGeom prst="line">
@@ -4228,7 +4233,7 @@
         </p:nvCxnSpPr>
         <p:spPr>
           <a:xfrm>
-            <a:off x="4780440" y="2813227"/>
+            <a:off x="5190343" y="4072071"/>
             <a:ext cx="646980" cy="0"/>
           </a:xfrm>
           <a:prstGeom prst="line">
@@ -4271,7 +4276,7 @@
         </p:nvCxnSpPr>
         <p:spPr>
           <a:xfrm flipH="1">
-            <a:off x="2596472" y="2900623"/>
+            <a:off x="3006375" y="4159467"/>
             <a:ext cx="858408" cy="508994"/>
           </a:xfrm>
           <a:prstGeom prst="straightConnector1">
@@ -4315,7 +4320,7 @@
         </p:nvCxnSpPr>
         <p:spPr>
           <a:xfrm flipH="1">
-            <a:off x="4178507" y="2900622"/>
+            <a:off x="4588410" y="4159466"/>
             <a:ext cx="197994" cy="528378"/>
           </a:xfrm>
           <a:prstGeom prst="straightConnector1">
@@ -4359,7 +4364,7 @@
         </p:nvCxnSpPr>
         <p:spPr>
           <a:xfrm>
-            <a:off x="5075895" y="2900622"/>
+            <a:off x="5485798" y="4159466"/>
             <a:ext cx="646980" cy="392415"/>
           </a:xfrm>
           <a:prstGeom prst="straightConnector1">
@@ -4401,7 +4406,7 @@
         </p:nvSpPr>
         <p:spPr>
           <a:xfrm>
-            <a:off x="983976" y="3540012"/>
+            <a:off x="1393879" y="4798856"/>
             <a:ext cx="2199172" cy="923330"/>
           </a:xfrm>
           <a:prstGeom prst="rect">
@@ -4486,7 +4491,7 @@
         </p:nvSpPr>
         <p:spPr>
           <a:xfrm>
-            <a:off x="3412667" y="3502382"/>
+            <a:off x="3822570" y="4761226"/>
             <a:ext cx="1840820" cy="1200329"/>
           </a:xfrm>
           <a:prstGeom prst="rect">
@@ -4559,7 +4564,7 @@
         </p:nvSpPr>
         <p:spPr>
           <a:xfrm>
-            <a:off x="5606418" y="3540012"/>
+            <a:off x="6016321" y="4798856"/>
             <a:ext cx="2364390" cy="646331"/>
           </a:xfrm>
           <a:prstGeom prst="rect">
@@ -4623,7 +4628,7 @@
         </p:nvCxnSpPr>
         <p:spPr>
           <a:xfrm flipH="1" flipV="1">
-            <a:off x="1565695" y="2385273"/>
+            <a:off x="1975598" y="3644117"/>
             <a:ext cx="1325079" cy="146017"/>
           </a:xfrm>
           <a:prstGeom prst="straightConnector1">
@@ -4665,7 +4670,7 @@
         </p:nvSpPr>
         <p:spPr>
           <a:xfrm>
-            <a:off x="389532" y="2160484"/>
+            <a:off x="799435" y="3419328"/>
             <a:ext cx="2199172" cy="369332"/>
           </a:xfrm>
           <a:prstGeom prst="rect">
@@ -4685,6 +4690,72 @@
               </a:rPr>
               <a:t>File type</a:t>
             </a:r>
+          </a:p>
+        </p:txBody>
+      </p:sp>
+      <p:sp>
+        <p:nvSpPr>
+          <p:cNvPr id="3" name="TextBox 2">
+            <a:extLst>
+              <a:ext uri="{FF2B5EF4-FFF2-40B4-BE49-F238E27FC236}">
+                <a16:creationId xmlns:a16="http://schemas.microsoft.com/office/drawing/2014/main" id="{6E7B2D13-0E76-757D-789C-C4FB3D300474}"/>
+              </a:ext>
+            </a:extLst>
+          </p:cNvPr>
+          <p:cNvSpPr txBox="1"/>
+          <p:nvPr/>
+        </p:nvSpPr>
+        <p:spPr>
+          <a:xfrm>
+            <a:off x="1090873" y="1517486"/>
+            <a:ext cx="7319632" cy="1477328"/>
+          </a:xfrm>
+          <a:prstGeom prst="rect">
+            <a:avLst/>
+          </a:prstGeom>
+          <a:noFill/>
+        </p:spPr>
+        <p:txBody>
+          <a:bodyPr wrap="none" rtlCol="0">
+            <a:spAutoFit/>
+          </a:bodyPr>
+          <a:lstStyle/>
+          <a:p>
+            <a:r>
+              <a:rPr lang="en-US" sz="3000" dirty="0">
+                <a:latin typeface="Helvetica Light" panose="020B0403020202020204" pitchFamily="34" charset="0"/>
+              </a:rPr>
+              <a:t>3 sets of 3 characters: </a:t>
+            </a:r>
+            <a:r>
+              <a:rPr lang="en-US" sz="3000" b="1" dirty="0">
+                <a:latin typeface="Helvetica Light" panose="020B0403020202020204" pitchFamily="34" charset="0"/>
+              </a:rPr>
+              <a:t>user, group, other</a:t>
+            </a:r>
+          </a:p>
+          <a:p>
+            <a:pPr algn="ctr"/>
+            <a:r>
+              <a:rPr lang="en-US" sz="3000" b="1" dirty="0">
+                <a:latin typeface="Helvetica Light" panose="020B0403020202020204" pitchFamily="34" charset="0"/>
+              </a:rPr>
+              <a:t>r: read		  w: write 		 x: </a:t>
+            </a:r>
+            <a:r>
+              <a:rPr lang="en-US" sz="3000" b="1" dirty="0" err="1">
+                <a:latin typeface="Helvetica Light" panose="020B0403020202020204" pitchFamily="34" charset="0"/>
+              </a:rPr>
+              <a:t>executre</a:t>
+            </a:r>
+            <a:endParaRPr lang="en-US" sz="3000" dirty="0">
+              <a:latin typeface="Helvetica Light" panose="020B0403020202020204" pitchFamily="34" charset="0"/>
+            </a:endParaRPr>
+          </a:p>
+          <a:p>
+            <a:endParaRPr lang="en-US" sz="3000" dirty="0">
+              <a:latin typeface="Helvetica Light" panose="020B0403020202020204" pitchFamily="34" charset="0"/>
+            </a:endParaRPr>
           </a:p>
         </p:txBody>
       </p:sp>
@@ -5946,7 +6017,7 @@
         <p:spPr>
           <a:xfrm>
             <a:off x="533062" y="431781"/>
-            <a:ext cx="5918608" cy="523220"/>
+            <a:ext cx="6986208" cy="584775"/>
           </a:xfrm>
           <a:prstGeom prst="rect">
             <a:avLst/>
@@ -5960,13 +6031,13 @@
           <a:lstStyle/>
           <a:p>
             <a:r>
-              <a:rPr lang="en-US" sz="2800" b="1" dirty="0" err="1">
+              <a:rPr lang="en-US" sz="3200" b="1" dirty="0" err="1">
                 <a:latin typeface="Helvetica Light" panose="020B0403020202020204" pitchFamily="34" charset="0"/>
               </a:rPr>
               <a:t>stdout</a:t>
             </a:r>
             <a:r>
-              <a:rPr lang="en-US" sz="2800" b="1" dirty="0">
+              <a:rPr lang="en-US" sz="3200" b="1" dirty="0">
                 <a:latin typeface="Helvetica Light" panose="020B0403020202020204" pitchFamily="34" charset="0"/>
               </a:rPr>
               <a:t>, redirection (&gt;), and pipes (|)</a:t>
@@ -6021,7 +6092,7 @@
               <a:t>) send </a:t>
             </a:r>
             <a:r>
-              <a:rPr lang="en-US" sz="2250" dirty="0" err="1">
+              <a:rPr lang="en-US" sz="2250" b="1" dirty="0" err="1">
                 <a:latin typeface="Helvetica Light" panose="020B0403020202020204" pitchFamily="34" charset="0"/>
               </a:rPr>
               <a:t>stdout</a:t>
@@ -6766,19 +6837,7 @@
               <a:rPr lang="en-US" sz="2000" dirty="0">
                 <a:latin typeface="Helvetica Light" panose="020B0403020202020204" pitchFamily="34" charset="0"/>
               </a:rPr>
-              <a:t>. Save the commands you want to execute in a file, </a:t>
-            </a:r>
-            <a:r>
-              <a:rPr lang="en-US" sz="2000" dirty="0" err="1">
-                <a:latin typeface="Helvetica Light" panose="020B0403020202020204" pitchFamily="34" charset="0"/>
-              </a:rPr>
-              <a:t>eg</a:t>
-            </a:r>
-            <a:r>
-              <a:rPr lang="en-US" sz="2000" dirty="0">
-                <a:latin typeface="Helvetica Light" panose="020B0403020202020204" pitchFamily="34" charset="0"/>
-              </a:rPr>
-              <a:t>. </a:t>
+              <a:t>. Save the commands you want to execute in a file, e.g., </a:t>
             </a:r>
             <a:r>
               <a:rPr lang="en-US" sz="2000" dirty="0" err="1">
@@ -10731,7 +10790,7 @@
         <p:spPr>
           <a:xfrm>
             <a:off x="1665919" y="692809"/>
-            <a:ext cx="6200736" cy="1384995"/>
+            <a:ext cx="5953874" cy="1384995"/>
           </a:xfrm>
           <a:prstGeom prst="rect">
             <a:avLst/>
@@ -10754,7 +10813,7 @@
               <a:rPr lang="en-US" sz="2800" dirty="0">
                 <a:latin typeface="Helvetica Light" panose="020B0403020202020204" pitchFamily="34" charset="0"/>
               </a:rPr>
-              <a:t> to backup a directory to a drive</a:t>
+              <a:t> to mirror a directory to a drive</a:t>
             </a:r>
           </a:p>
           <a:p>

--- a/week3_unixIII/week3.pptx
+++ b/week3_unixIII/week3.pptx
@@ -3824,7 +3824,7 @@
         <p:spPr>
           <a:xfrm>
             <a:off x="1414725" y="407506"/>
-            <a:ext cx="6314549" cy="553998"/>
+            <a:ext cx="6463629" cy="553998"/>
           </a:xfrm>
           <a:prstGeom prst="rect">
             <a:avLst/>
@@ -3841,8 +3841,17 @@
               <a:rPr lang="en-US" sz="3000" dirty="0">
                 <a:latin typeface="Helvetica Light" panose="020B0403020202020204" pitchFamily="34" charset="0"/>
               </a:rPr>
-              <a:t>Week 3: some more advanced Unix</a:t>
-            </a:r>
+              <a:t>Week 3: some more </a:t>
+            </a:r>
+            <a:r>
+              <a:rPr lang="en-US" sz="3000">
+                <a:latin typeface="Helvetica Light" panose="020B0403020202020204" pitchFamily="34" charset="0"/>
+              </a:rPr>
+              <a:t>advanced Linux</a:t>
+            </a:r>
+            <a:endParaRPr lang="en-US" sz="3000" dirty="0">
+              <a:latin typeface="Helvetica Light" panose="020B0403020202020204" pitchFamily="34" charset="0"/>
+            </a:endParaRPr>
           </a:p>
         </p:txBody>
       </p:sp>
